--- a/multimodal_system_architecture.pptx
+++ b/multimodal_system_architecture.pptx
@@ -3147,30 +3147,6 @@
           </a:p>
         </p:txBody>
       </p:sp>
-      <p:pic>
-        <p:nvPicPr>
-          <p:cNvPr id="4" name="Picture 3" descr="rgb_crop.png"/>
-          <p:cNvPicPr>
-            <a:picLocks noChangeAspect="1"/>
-          </p:cNvPicPr>
-          <p:nvPr/>
-        </p:nvPicPr>
-        <p:blipFill>
-          <a:blip r:embed="rId3"/>
-          <a:stretch>
-            <a:fillRect/>
-          </a:stretch>
-        </p:blipFill>
-        <p:spPr>
-          <a:xfrm>
-            <a:off x="1965960" y="320040"/>
-            <a:ext cx="1691640" cy="969264"/>
-          </a:xfrm>
-          <a:prstGeom prst="rect">
-            <a:avLst/>
-          </a:prstGeom>
-        </p:spPr>
-      </p:pic>
       <p:sp>
         <p:nvSpPr>
           <p:cNvPr id="5" name="TextBox 4"/>
@@ -5740,30 +5716,6 @@
           </a:p>
         </p:txBody>
       </p:sp>
-      <p:pic>
-        <p:nvPicPr>
-          <p:cNvPr id="64" name="Picture 63" descr="spawned_robot.png"/>
-          <p:cNvPicPr>
-            <a:picLocks noChangeAspect="1"/>
-          </p:cNvPicPr>
-          <p:nvPr/>
-        </p:nvPicPr>
-        <p:blipFill>
-          <a:blip r:embed="rId7"/>
-          <a:stretch>
-            <a:fillRect/>
-          </a:stretch>
-        </p:blipFill>
-        <p:spPr>
-          <a:xfrm>
-            <a:off x="8915400" y="5074920"/>
-            <a:ext cx="3017520" cy="1633103"/>
-          </a:xfrm>
-          <a:prstGeom prst="rect">
-            <a:avLst/>
-          </a:prstGeom>
-        </p:spPr>
-      </p:pic>
       <p:sp>
         <p:nvSpPr>
           <p:cNvPr id="65" name="Rectangle 64"/>
@@ -5844,6 +5796,54 @@
           </a:fontRef>
         </p:style>
       </p:cxnSp>
+      <p:pic>
+        <p:nvPicPr>
+          <p:cNvPr id="67" name="Picture 66" descr="rgb_crop.png"/>
+          <p:cNvPicPr>
+            <a:picLocks noChangeAspect="1"/>
+          </p:cNvPicPr>
+          <p:nvPr/>
+        </p:nvPicPr>
+        <p:blipFill>
+          <a:blip r:embed="rId8"/>
+          <a:stretch>
+            <a:fillRect/>
+          </a:stretch>
+        </p:blipFill>
+        <p:spPr>
+          <a:xfrm>
+            <a:off x="1965960" y="320040"/>
+            <a:ext cx="1691640" cy="969264"/>
+          </a:xfrm>
+          <a:prstGeom prst="rect">
+            <a:avLst/>
+          </a:prstGeom>
+        </p:spPr>
+      </p:pic>
+      <p:pic>
+        <p:nvPicPr>
+          <p:cNvPr id="68" name="Picture 67" descr="world_crop.png"/>
+          <p:cNvPicPr>
+            <a:picLocks noChangeAspect="1"/>
+          </p:cNvPicPr>
+          <p:nvPr/>
+        </p:nvPicPr>
+        <p:blipFill>
+          <a:blip r:embed="rId9"/>
+          <a:stretch>
+            <a:fillRect/>
+          </a:stretch>
+        </p:blipFill>
+        <p:spPr>
+          <a:xfrm>
+            <a:off x="8915400" y="5074920"/>
+            <a:ext cx="3017520" cy="1633103"/>
+          </a:xfrm>
+          <a:prstGeom prst="rect">
+            <a:avLst/>
+          </a:prstGeom>
+        </p:spPr>
+      </p:pic>
     </p:spTree>
   </p:cSld>
   <p:clrMapOvr>
